--- a/ゲーム科1年/00_前期/ゲームプログラミングⅢ/ゲーム数学/座学/20_ベクトルのなす角.pptx
+++ b/ゲーム科1年/00_前期/ゲームプログラミングⅢ/ゲーム数学/座学/20_ベクトルのなす角.pptx
@@ -264,7 +264,7 @@
           <a:p>
             <a:fld id="{E9CC885B-4903-4D54-9A93-00025F12DED9}" type="datetimeFigureOut">
               <a:rPr kumimoji="1" lang="ja-JP" altLang="en-US" smtClean="0"/>
-              <a:t>2024/10/11</a:t>
+              <a:t>2025/7/8</a:t>
             </a:fld>
             <a:endParaRPr kumimoji="1" lang="ja-JP" altLang="en-US"/>
           </a:p>
@@ -494,7 +494,7 @@
           <a:p>
             <a:fld id="{E9CC885B-4903-4D54-9A93-00025F12DED9}" type="datetimeFigureOut">
               <a:rPr kumimoji="1" lang="ja-JP" altLang="en-US" smtClean="0"/>
-              <a:t>2024/10/11</a:t>
+              <a:t>2025/7/8</a:t>
             </a:fld>
             <a:endParaRPr kumimoji="1" lang="ja-JP" altLang="en-US"/>
           </a:p>
@@ -734,7 +734,7 @@
           <a:p>
             <a:fld id="{E9CC885B-4903-4D54-9A93-00025F12DED9}" type="datetimeFigureOut">
               <a:rPr kumimoji="1" lang="ja-JP" altLang="en-US" smtClean="0"/>
-              <a:t>2024/10/11</a:t>
+              <a:t>2025/7/8</a:t>
             </a:fld>
             <a:endParaRPr kumimoji="1" lang="ja-JP" altLang="en-US"/>
           </a:p>
@@ -964,7 +964,7 @@
           <a:p>
             <a:fld id="{E9CC885B-4903-4D54-9A93-00025F12DED9}" type="datetimeFigureOut">
               <a:rPr kumimoji="1" lang="ja-JP" altLang="en-US" smtClean="0"/>
-              <a:t>2024/10/11</a:t>
+              <a:t>2025/7/8</a:t>
             </a:fld>
             <a:endParaRPr kumimoji="1" lang="ja-JP" altLang="en-US"/>
           </a:p>
@@ -1239,7 +1239,7 @@
           <a:p>
             <a:fld id="{E9CC885B-4903-4D54-9A93-00025F12DED9}" type="datetimeFigureOut">
               <a:rPr kumimoji="1" lang="ja-JP" altLang="en-US" smtClean="0"/>
-              <a:t>2024/10/11</a:t>
+              <a:t>2025/7/8</a:t>
             </a:fld>
             <a:endParaRPr kumimoji="1" lang="ja-JP" altLang="en-US"/>
           </a:p>
@@ -1568,7 +1568,7 @@
           <a:p>
             <a:fld id="{E9CC885B-4903-4D54-9A93-00025F12DED9}" type="datetimeFigureOut">
               <a:rPr kumimoji="1" lang="ja-JP" altLang="en-US" smtClean="0"/>
-              <a:t>2024/10/11</a:t>
+              <a:t>2025/7/8</a:t>
             </a:fld>
             <a:endParaRPr kumimoji="1" lang="ja-JP" altLang="en-US"/>
           </a:p>
@@ -2044,7 +2044,7 @@
           <a:p>
             <a:fld id="{E9CC885B-4903-4D54-9A93-00025F12DED9}" type="datetimeFigureOut">
               <a:rPr kumimoji="1" lang="ja-JP" altLang="en-US" smtClean="0"/>
-              <a:t>2024/10/11</a:t>
+              <a:t>2025/7/8</a:t>
             </a:fld>
             <a:endParaRPr kumimoji="1" lang="ja-JP" altLang="en-US"/>
           </a:p>
@@ -2185,7 +2185,7 @@
           <a:p>
             <a:fld id="{E9CC885B-4903-4D54-9A93-00025F12DED9}" type="datetimeFigureOut">
               <a:rPr kumimoji="1" lang="ja-JP" altLang="en-US" smtClean="0"/>
-              <a:t>2024/10/11</a:t>
+              <a:t>2025/7/8</a:t>
             </a:fld>
             <a:endParaRPr kumimoji="1" lang="ja-JP" altLang="en-US"/>
           </a:p>
@@ -2298,7 +2298,7 @@
           <a:p>
             <a:fld id="{E9CC885B-4903-4D54-9A93-00025F12DED9}" type="datetimeFigureOut">
               <a:rPr kumimoji="1" lang="ja-JP" altLang="en-US" smtClean="0"/>
-              <a:t>2024/10/11</a:t>
+              <a:t>2025/7/8</a:t>
             </a:fld>
             <a:endParaRPr kumimoji="1" lang="ja-JP" altLang="en-US"/>
           </a:p>
@@ -2641,7 +2641,7 @@
           <a:p>
             <a:fld id="{E9CC885B-4903-4D54-9A93-00025F12DED9}" type="datetimeFigureOut">
               <a:rPr kumimoji="1" lang="ja-JP" altLang="en-US" smtClean="0"/>
-              <a:t>2024/10/11</a:t>
+              <a:t>2025/7/8</a:t>
             </a:fld>
             <a:endParaRPr kumimoji="1" lang="ja-JP" altLang="en-US"/>
           </a:p>
@@ -2929,7 +2929,7 @@
           <a:p>
             <a:fld id="{E9CC885B-4903-4D54-9A93-00025F12DED9}" type="datetimeFigureOut">
               <a:rPr kumimoji="1" lang="ja-JP" altLang="en-US" smtClean="0"/>
-              <a:t>2024/10/11</a:t>
+              <a:t>2025/7/8</a:t>
             </a:fld>
             <a:endParaRPr kumimoji="1" lang="ja-JP" altLang="en-US"/>
           </a:p>
@@ -3202,7 +3202,7 @@
           <a:p>
             <a:fld id="{E9CC885B-4903-4D54-9A93-00025F12DED9}" type="datetimeFigureOut">
               <a:rPr kumimoji="1" lang="ja-JP" altLang="en-US" smtClean="0"/>
-              <a:t>2024/10/11</a:t>
+              <a:t>2025/7/8</a:t>
             </a:fld>
             <a:endParaRPr kumimoji="1" lang="ja-JP" altLang="en-US"/>
           </a:p>
@@ -3689,7 +3689,7 @@
                   <a:schemeClr val="tx1"/>
                 </a:solidFill>
               </a:rPr>
-              <a:t>２つのベクトルの始点を合わせると角かできます。</a:t>
+              <a:t>２つのベクトルの始点を合わせると角ができます。</a:t>
             </a:r>
             <a:endParaRPr lang="en-US" altLang="ja-JP" sz="2400" dirty="0">
               <a:solidFill>
@@ -3922,6 +3922,60 @@
           <a:chExt cx="0" cy="0"/>
         </a:xfrm>
       </p:grpSpPr>
+      <p:sp>
+        <p:nvSpPr>
+          <p:cNvPr id="2" name="四角形: 角を丸くする 1">
+            <a:extLst>
+              <a:ext uri="{FF2B5EF4-FFF2-40B4-BE49-F238E27FC236}">
+                <a16:creationId xmlns:a16="http://schemas.microsoft.com/office/drawing/2014/main" id="{2B38EB49-6D0A-4155-B053-4DACF2D0B489}"/>
+              </a:ext>
+            </a:extLst>
+          </p:cNvPr>
+          <p:cNvSpPr/>
+          <p:nvPr/>
+        </p:nvSpPr>
+        <p:spPr>
+          <a:xfrm>
+            <a:off x="333855" y="2168873"/>
+            <a:ext cx="4356678" cy="1048460"/>
+          </a:xfrm>
+          <a:prstGeom prst="roundRect">
+            <a:avLst/>
+          </a:prstGeom>
+          <a:solidFill>
+            <a:schemeClr val="bg1">
+              <a:lumMod val="85000"/>
+            </a:schemeClr>
+          </a:solidFill>
+          <a:ln>
+            <a:noFill/>
+          </a:ln>
+        </p:spPr>
+        <p:style>
+          <a:lnRef idx="2">
+            <a:schemeClr val="accent1">
+              <a:shade val="50000"/>
+            </a:schemeClr>
+          </a:lnRef>
+          <a:fillRef idx="1">
+            <a:schemeClr val="accent1"/>
+          </a:fillRef>
+          <a:effectRef idx="0">
+            <a:schemeClr val="accent1"/>
+          </a:effectRef>
+          <a:fontRef idx="minor">
+            <a:schemeClr val="lt1"/>
+          </a:fontRef>
+        </p:style>
+        <p:txBody>
+          <a:bodyPr rtlCol="0" anchor="ctr"/>
+          <a:lstStyle/>
+          <a:p>
+            <a:pPr algn="ctr"/>
+            <a:endParaRPr kumimoji="1" lang="ja-JP" altLang="en-US"/>
+          </a:p>
+        </p:txBody>
+      </p:sp>
       <p:sp>
         <p:nvSpPr>
           <p:cNvPr id="4" name="テキスト ボックス 3">
@@ -4267,6 +4321,60 @@
           <a:chExt cx="0" cy="0"/>
         </a:xfrm>
       </p:grpSpPr>
+      <p:sp>
+        <p:nvSpPr>
+          <p:cNvPr id="5" name="四角形: 角を丸くする 4">
+            <a:extLst>
+              <a:ext uri="{FF2B5EF4-FFF2-40B4-BE49-F238E27FC236}">
+                <a16:creationId xmlns:a16="http://schemas.microsoft.com/office/drawing/2014/main" id="{4F80123D-880F-4A54-B19E-2B0A892AAF87}"/>
+              </a:ext>
+            </a:extLst>
+          </p:cNvPr>
+          <p:cNvSpPr/>
+          <p:nvPr/>
+        </p:nvSpPr>
+        <p:spPr>
+          <a:xfrm>
+            <a:off x="333854" y="2168873"/>
+            <a:ext cx="5762145" cy="1878194"/>
+          </a:xfrm>
+          <a:prstGeom prst="roundRect">
+            <a:avLst/>
+          </a:prstGeom>
+          <a:solidFill>
+            <a:schemeClr val="bg1">
+              <a:lumMod val="85000"/>
+            </a:schemeClr>
+          </a:solidFill>
+          <a:ln>
+            <a:noFill/>
+          </a:ln>
+        </p:spPr>
+        <p:style>
+          <a:lnRef idx="2">
+            <a:schemeClr val="accent1">
+              <a:shade val="50000"/>
+            </a:schemeClr>
+          </a:lnRef>
+          <a:fillRef idx="1">
+            <a:schemeClr val="accent1"/>
+          </a:fillRef>
+          <a:effectRef idx="0">
+            <a:schemeClr val="accent1"/>
+          </a:effectRef>
+          <a:fontRef idx="minor">
+            <a:schemeClr val="lt1"/>
+          </a:fontRef>
+        </p:style>
+        <p:txBody>
+          <a:bodyPr rtlCol="0" anchor="ctr"/>
+          <a:lstStyle/>
+          <a:p>
+            <a:pPr algn="ctr"/>
+            <a:endParaRPr kumimoji="1" lang="ja-JP" altLang="en-US"/>
+          </a:p>
+        </p:txBody>
+      </p:sp>
       <p:sp>
         <p:nvSpPr>
           <p:cNvPr id="4" name="テキスト ボックス 3">
@@ -5610,6 +5718,60 @@
       </p:grpSpPr>
       <p:sp>
         <p:nvSpPr>
+          <p:cNvPr id="5" name="四角形: 角を丸くする 4">
+            <a:extLst>
+              <a:ext uri="{FF2B5EF4-FFF2-40B4-BE49-F238E27FC236}">
+                <a16:creationId xmlns:a16="http://schemas.microsoft.com/office/drawing/2014/main" id="{883AD6B3-51A5-4459-B3DB-1FE827BCDBA7}"/>
+              </a:ext>
+            </a:extLst>
+          </p:cNvPr>
+          <p:cNvSpPr/>
+          <p:nvPr/>
+        </p:nvSpPr>
+        <p:spPr>
+          <a:xfrm>
+            <a:off x="333855" y="1864073"/>
+            <a:ext cx="6244745" cy="2470860"/>
+          </a:xfrm>
+          <a:prstGeom prst="roundRect">
+            <a:avLst/>
+          </a:prstGeom>
+          <a:solidFill>
+            <a:schemeClr val="bg1">
+              <a:lumMod val="85000"/>
+            </a:schemeClr>
+          </a:solidFill>
+          <a:ln>
+            <a:noFill/>
+          </a:ln>
+        </p:spPr>
+        <p:style>
+          <a:lnRef idx="2">
+            <a:schemeClr val="accent1">
+              <a:shade val="50000"/>
+            </a:schemeClr>
+          </a:lnRef>
+          <a:fillRef idx="1">
+            <a:schemeClr val="accent1"/>
+          </a:fillRef>
+          <a:effectRef idx="0">
+            <a:schemeClr val="accent1"/>
+          </a:effectRef>
+          <a:fontRef idx="minor">
+            <a:schemeClr val="lt1"/>
+          </a:fontRef>
+        </p:style>
+        <p:txBody>
+          <a:bodyPr rtlCol="0" anchor="ctr"/>
+          <a:lstStyle/>
+          <a:p>
+            <a:pPr algn="ctr"/>
+            <a:endParaRPr kumimoji="1" lang="ja-JP" altLang="en-US"/>
+          </a:p>
+        </p:txBody>
+      </p:sp>
+      <p:sp>
+        <p:nvSpPr>
           <p:cNvPr id="4" name="テキスト ボックス 3">
             <a:extLst>
               <a:ext uri="{FF2B5EF4-FFF2-40B4-BE49-F238E27FC236}">
@@ -5644,8 +5806,8 @@
           </a:p>
         </p:txBody>
       </p:sp>
-      <mc:AlternateContent xmlns:mc="http://schemas.openxmlformats.org/markup-compatibility/2006">
-        <mc:Choice xmlns:a14="http://schemas.microsoft.com/office/drawing/2010/main" Requires="a14">
+      <mc:AlternateContent xmlns:mc="http://schemas.openxmlformats.org/markup-compatibility/2006" xmlns:a14="http://schemas.microsoft.com/office/drawing/2010/main">
+        <mc:Choice Requires="a14">
           <p:sp>
             <p:nvSpPr>
               <p:cNvPr id="6" name="テキスト ボックス 5">
@@ -5939,7 +6101,7 @@
             </p:txBody>
           </p:sp>
         </mc:Choice>
-        <mc:Fallback>
+        <mc:Fallback xmlns="">
           <p:sp>
             <p:nvSpPr>
               <p:cNvPr id="6" name="テキスト ボックス 5">
